--- a/01 Classes/Aula 12 Parte 1 Desenvolvimento de Software  Java - Resumo IDE Java e Sping.pptx
+++ b/01 Classes/Aula 12 Parte 1 Desenvolvimento de Software  Java - Resumo IDE Java e Sping.pptx
@@ -5013,8 +5013,55 @@
                 <a:latin typeface="Times New Roman" panose="02020603050405020304" pitchFamily="18" charset="0"/>
                 <a:cs typeface="Times New Roman" panose="02020603050405020304" pitchFamily="18" charset="0"/>
               </a:rPr>
-              <a:t>Saída de Dados</a:t>
-            </a:r>
+              <a:t>Saída de Dados - </a:t>
+            </a:r>
+            <a:r>
+              <a:rPr lang="pt-BR" sz="2200" b="1" dirty="0" err="1">
+                <a:solidFill>
+                  <a:srgbClr val="FF0000"/>
+                </a:solidFill>
+                <a:latin typeface="Times New Roman" panose="02020603050405020304" pitchFamily="18" charset="0"/>
+                <a:cs typeface="Times New Roman" panose="02020603050405020304" pitchFamily="18" charset="0"/>
+              </a:rPr>
+              <a:t>sysout</a:t>
+            </a:r>
+            <a:r>
+              <a:rPr lang="pt-BR" sz="2200" dirty="0">
+                <a:solidFill>
+                  <a:schemeClr val="tx1"/>
+                </a:solidFill>
+                <a:latin typeface="Times New Roman" panose="02020603050405020304" pitchFamily="18" charset="0"/>
+                <a:cs typeface="Times New Roman" panose="02020603050405020304" pitchFamily="18" charset="0"/>
+              </a:rPr>
+              <a:t> + </a:t>
+            </a:r>
+            <a:r>
+              <a:rPr lang="pt-BR" sz="2200" dirty="0" err="1">
+                <a:solidFill>
+                  <a:schemeClr val="tx1"/>
+                </a:solidFill>
+                <a:latin typeface="Times New Roman" panose="02020603050405020304" pitchFamily="18" charset="0"/>
+                <a:cs typeface="Times New Roman" panose="02020603050405020304" pitchFamily="18" charset="0"/>
+              </a:rPr>
+              <a:t>ctrl+barra</a:t>
+            </a:r>
+            <a:r>
+              <a:rPr lang="pt-BR" sz="2200" dirty="0">
+                <a:solidFill>
+                  <a:schemeClr val="tx1"/>
+                </a:solidFill>
+                <a:latin typeface="Times New Roman" panose="02020603050405020304" pitchFamily="18" charset="0"/>
+                <a:cs typeface="Times New Roman" panose="02020603050405020304" pitchFamily="18" charset="0"/>
+              </a:rPr>
+              <a:t> de espaço</a:t>
+            </a:r>
+            <a:endParaRPr lang="pt-BR" sz="2200" b="1" dirty="0">
+              <a:solidFill>
+                <a:schemeClr val="tx1"/>
+              </a:solidFill>
+              <a:latin typeface="Times New Roman" panose="02020603050405020304" pitchFamily="18" charset="0"/>
+              <a:cs typeface="Times New Roman" panose="02020603050405020304" pitchFamily="18" charset="0"/>
+            </a:endParaRPr>
           </a:p>
           <a:p>
             <a:pPr lvl="2" algn="just">
@@ -5959,7 +6006,7 @@
               <a:buNone/>
             </a:pPr>
             <a:r>
-              <a:rPr lang="pt-BR" sz="2200" dirty="0" err="1">
+              <a:rPr lang="pt-BR" sz="2200" b="1" dirty="0" err="1">
                 <a:solidFill>
                   <a:schemeClr val="tx1"/>
                 </a:solidFill>
@@ -6304,14 +6351,24 @@
               <a:buNone/>
             </a:pPr>
             <a:r>
-              <a:rPr lang="pt-BR" sz="2200" dirty="0">
-                <a:solidFill>
-                  <a:schemeClr val="tx1"/>
-                </a:solidFill>
-                <a:latin typeface="Times New Roman" panose="02020603050405020304" pitchFamily="18" charset="0"/>
-                <a:cs typeface="Times New Roman" panose="02020603050405020304" pitchFamily="18" charset="0"/>
-              </a:rPr>
-              <a:t>do{</a:t>
+              <a:rPr lang="pt-BR" sz="2200" b="1" dirty="0">
+                <a:solidFill>
+                  <a:schemeClr val="tx1"/>
+                </a:solidFill>
+                <a:latin typeface="Times New Roman" panose="02020603050405020304" pitchFamily="18" charset="0"/>
+                <a:cs typeface="Times New Roman" panose="02020603050405020304" pitchFamily="18" charset="0"/>
+              </a:rPr>
+              <a:t>do</a:t>
+            </a:r>
+            <a:r>
+              <a:rPr lang="pt-BR" sz="2200" dirty="0">
+                <a:solidFill>
+                  <a:schemeClr val="tx1"/>
+                </a:solidFill>
+                <a:latin typeface="Times New Roman" panose="02020603050405020304" pitchFamily="18" charset="0"/>
+                <a:cs typeface="Times New Roman" panose="02020603050405020304" pitchFamily="18" charset="0"/>
+              </a:rPr>
+              <a:t>{</a:t>
             </a:r>
           </a:p>
           <a:p>
@@ -6578,7 +6635,27 @@
                 <a:latin typeface="Times New Roman" panose="02020603050405020304" pitchFamily="18" charset="0"/>
                 <a:cs typeface="Times New Roman" panose="02020603050405020304" pitchFamily="18" charset="0"/>
               </a:rPr>
-              <a:t>; do; </a:t>
+              <a:t>; do/</a:t>
+            </a:r>
+            <a:r>
+              <a:rPr lang="pt-BR" sz="2200" b="1" dirty="0" err="1">
+                <a:solidFill>
+                  <a:schemeClr val="tx1"/>
+                </a:solidFill>
+                <a:latin typeface="Times New Roman" panose="02020603050405020304" pitchFamily="18" charset="0"/>
+                <a:cs typeface="Times New Roman" panose="02020603050405020304" pitchFamily="18" charset="0"/>
+              </a:rPr>
+              <a:t>while</a:t>
+            </a:r>
+            <a:r>
+              <a:rPr lang="pt-BR" sz="2200" b="1" dirty="0">
+                <a:solidFill>
+                  <a:schemeClr val="tx1"/>
+                </a:solidFill>
+                <a:latin typeface="Times New Roman" panose="02020603050405020304" pitchFamily="18" charset="0"/>
+                <a:cs typeface="Times New Roman" panose="02020603050405020304" pitchFamily="18" charset="0"/>
+              </a:rPr>
+              <a:t>; </a:t>
             </a:r>
             <a:r>
               <a:rPr lang="pt-BR" sz="2200" b="1" dirty="0" err="1">
@@ -6631,14 +6708,24 @@
               <a:buNone/>
             </a:pPr>
             <a:r>
-              <a:rPr lang="pt-BR" sz="2200" dirty="0">
-                <a:solidFill>
-                  <a:schemeClr val="tx1"/>
-                </a:solidFill>
-                <a:latin typeface="Times New Roman" panose="02020603050405020304" pitchFamily="18" charset="0"/>
-                <a:cs typeface="Times New Roman" panose="02020603050405020304" pitchFamily="18" charset="0"/>
-              </a:rPr>
-              <a:t>for (</a:t>
+              <a:rPr lang="pt-BR" sz="2200" b="1" dirty="0">
+                <a:solidFill>
+                  <a:schemeClr val="tx1"/>
+                </a:solidFill>
+                <a:latin typeface="Times New Roman" panose="02020603050405020304" pitchFamily="18" charset="0"/>
+                <a:cs typeface="Times New Roman" panose="02020603050405020304" pitchFamily="18" charset="0"/>
+              </a:rPr>
+              <a:t>for</a:t>
+            </a:r>
+            <a:r>
+              <a:rPr lang="pt-BR" sz="2200" dirty="0">
+                <a:solidFill>
+                  <a:schemeClr val="tx1"/>
+                </a:solidFill>
+                <a:latin typeface="Times New Roman" panose="02020603050405020304" pitchFamily="18" charset="0"/>
+                <a:cs typeface="Times New Roman" panose="02020603050405020304" pitchFamily="18" charset="0"/>
+              </a:rPr>
+              <a:t> (</a:t>
             </a:r>
             <a:r>
               <a:rPr lang="pt-BR" sz="2200" dirty="0" err="1">
@@ -6890,7 +6977,27 @@
                 <a:latin typeface="Times New Roman" panose="02020603050405020304" pitchFamily="18" charset="0"/>
                 <a:cs typeface="Times New Roman" panose="02020603050405020304" pitchFamily="18" charset="0"/>
               </a:rPr>
-              <a:t>; do; </a:t>
+              <a:t>; do/</a:t>
+            </a:r>
+            <a:r>
+              <a:rPr lang="pt-BR" sz="2200" b="1" dirty="0" err="1">
+                <a:solidFill>
+                  <a:schemeClr val="tx1"/>
+                </a:solidFill>
+                <a:latin typeface="Times New Roman" panose="02020603050405020304" pitchFamily="18" charset="0"/>
+                <a:cs typeface="Times New Roman" panose="02020603050405020304" pitchFamily="18" charset="0"/>
+              </a:rPr>
+              <a:t>while</a:t>
+            </a:r>
+            <a:r>
+              <a:rPr lang="pt-BR" sz="2200" b="1" dirty="0">
+                <a:solidFill>
+                  <a:schemeClr val="tx1"/>
+                </a:solidFill>
+                <a:latin typeface="Times New Roman" panose="02020603050405020304" pitchFamily="18" charset="0"/>
+                <a:cs typeface="Times New Roman" panose="02020603050405020304" pitchFamily="18" charset="0"/>
+              </a:rPr>
+              <a:t>; </a:t>
             </a:r>
             <a:r>
               <a:rPr lang="pt-BR" sz="2200" b="1" dirty="0" err="1">
@@ -6938,14 +7045,24 @@
               <a:buNone/>
             </a:pPr>
             <a:r>
-              <a:rPr lang="pt-BR" sz="2200" dirty="0">
-                <a:solidFill>
-                  <a:schemeClr val="tx1"/>
-                </a:solidFill>
-                <a:latin typeface="Times New Roman" panose="02020603050405020304" pitchFamily="18" charset="0"/>
-                <a:cs typeface="Times New Roman" panose="02020603050405020304" pitchFamily="18" charset="0"/>
-              </a:rPr>
-              <a:t>for (&lt;Tipo&gt; &lt;identificação&gt; : &lt;</a:t>
+              <a:rPr lang="pt-BR" sz="2200" b="1" dirty="0">
+                <a:solidFill>
+                  <a:schemeClr val="tx1"/>
+                </a:solidFill>
+                <a:latin typeface="Times New Roman" panose="02020603050405020304" pitchFamily="18" charset="0"/>
+                <a:cs typeface="Times New Roman" panose="02020603050405020304" pitchFamily="18" charset="0"/>
+              </a:rPr>
+              <a:t>for</a:t>
+            </a:r>
+            <a:r>
+              <a:rPr lang="pt-BR" sz="2200" dirty="0">
+                <a:solidFill>
+                  <a:schemeClr val="tx1"/>
+                </a:solidFill>
+                <a:latin typeface="Times New Roman" panose="02020603050405020304" pitchFamily="18" charset="0"/>
+                <a:cs typeface="Times New Roman" panose="02020603050405020304" pitchFamily="18" charset="0"/>
+              </a:rPr>
+              <a:t> (&lt;Tipo&gt; &lt;identificação&gt; : &lt;</a:t>
             </a:r>
             <a:r>
               <a:rPr lang="pt-BR" sz="2200" dirty="0" err="1">
@@ -7015,6 +7132,16 @@
               <a:buNone/>
             </a:pPr>
             <a:r>
+              <a:rPr lang="en-US" sz="2200" b="1" dirty="0">
+                <a:solidFill>
+                  <a:schemeClr val="tx1"/>
+                </a:solidFill>
+                <a:latin typeface="Times New Roman" panose="02020603050405020304" pitchFamily="18" charset="0"/>
+                <a:cs typeface="Times New Roman" panose="02020603050405020304" pitchFamily="18" charset="0"/>
+              </a:rPr>
+              <a:t>for</a:t>
+            </a:r>
+            <a:r>
               <a:rPr lang="en-US" sz="2200" dirty="0">
                 <a:solidFill>
                   <a:schemeClr val="tx1"/>
@@ -7022,7 +7149,7 @@
                 <a:latin typeface="Times New Roman" panose="02020603050405020304" pitchFamily="18" charset="0"/>
                 <a:cs typeface="Times New Roman" panose="02020603050405020304" pitchFamily="18" charset="0"/>
               </a:rPr>
-              <a:t>for (int count : </a:t>
+              <a:t> (int count : </a:t>
             </a:r>
             <a:r>
               <a:rPr lang="en-US" sz="2200" dirty="0" err="1">
@@ -7857,7 +7984,7 @@
                 <a:latin typeface="Times New Roman" panose="02020603050405020304" pitchFamily="18" charset="0"/>
                 <a:cs typeface="Times New Roman" panose="02020603050405020304" pitchFamily="18" charset="0"/>
               </a:rPr>
-              <a:t>[n]; // declaração e alocação de espaço para o vetor "v"</a:t>
+              <a:t>[n]; // declaração e alocação de espaço p/ o vetor "v"</a:t>
             </a:r>
           </a:p>
           <a:p>
@@ -7922,7 +8049,27 @@
                 <a:latin typeface="Times New Roman" panose="02020603050405020304" pitchFamily="18" charset="0"/>
                 <a:cs typeface="Times New Roman" panose="02020603050405020304" pitchFamily="18" charset="0"/>
               </a:rPr>
-              <a:t>	for (i=0; i&lt;n; i++) {</a:t>
+              <a:t>	</a:t>
+            </a:r>
+            <a:r>
+              <a:rPr lang="pt-BR" sz="2200" b="1" dirty="0">
+                <a:solidFill>
+                  <a:schemeClr val="tx1"/>
+                </a:solidFill>
+                <a:latin typeface="Times New Roman" panose="02020603050405020304" pitchFamily="18" charset="0"/>
+                <a:cs typeface="Times New Roman" panose="02020603050405020304" pitchFamily="18" charset="0"/>
+              </a:rPr>
+              <a:t>for</a:t>
+            </a:r>
+            <a:r>
+              <a:rPr lang="pt-BR" sz="2200" dirty="0">
+                <a:solidFill>
+                  <a:schemeClr val="tx1"/>
+                </a:solidFill>
+                <a:latin typeface="Times New Roman" panose="02020603050405020304" pitchFamily="18" charset="0"/>
+                <a:cs typeface="Times New Roman" panose="02020603050405020304" pitchFamily="18" charset="0"/>
+              </a:rPr>
+              <a:t> (i=0; i&lt;n; i++) {</a:t>
             </a:r>
           </a:p>
           <a:p>
@@ -7937,27 +8084,7 @@
                 <a:latin typeface="Times New Roman" panose="02020603050405020304" pitchFamily="18" charset="0"/>
                 <a:cs typeface="Times New Roman" panose="02020603050405020304" pitchFamily="18" charset="0"/>
               </a:rPr>
-              <a:t>  		v[i] = i; // na i-</a:t>
-            </a:r>
-            <a:r>
-              <a:rPr lang="pt-BR" sz="2200" dirty="0" err="1">
-                <a:solidFill>
-                  <a:schemeClr val="tx1"/>
-                </a:solidFill>
-                <a:latin typeface="Times New Roman" panose="02020603050405020304" pitchFamily="18" charset="0"/>
-                <a:cs typeface="Times New Roman" panose="02020603050405020304" pitchFamily="18" charset="0"/>
-              </a:rPr>
-              <a:t>ésima</a:t>
-            </a:r>
-            <a:r>
-              <a:rPr lang="pt-BR" sz="2200" dirty="0">
-                <a:solidFill>
-                  <a:schemeClr val="tx1"/>
-                </a:solidFill>
-                <a:latin typeface="Times New Roman" panose="02020603050405020304" pitchFamily="18" charset="0"/>
-                <a:cs typeface="Times New Roman" panose="02020603050405020304" pitchFamily="18" charset="0"/>
-              </a:rPr>
-              <a:t> posição do vetor "v" armazena o valor da viável "i"</a:t>
+              <a:t>  		v[i] = i; // no vetor armazena o valor da viável "i“}</a:t>
             </a:r>
           </a:p>
           <a:p>
@@ -7972,7 +8099,112 @@
                 <a:latin typeface="Times New Roman" panose="02020603050405020304" pitchFamily="18" charset="0"/>
                 <a:cs typeface="Times New Roman" panose="02020603050405020304" pitchFamily="18" charset="0"/>
               </a:rPr>
-              <a:t>}</a:t>
+              <a:t>	</a:t>
+            </a:r>
+            <a:r>
+              <a:rPr lang="pt-BR" sz="2200" b="1" dirty="0">
+                <a:solidFill>
+                  <a:schemeClr val="tx1"/>
+                </a:solidFill>
+                <a:latin typeface="Times New Roman" panose="02020603050405020304" pitchFamily="18" charset="0"/>
+                <a:cs typeface="Times New Roman" panose="02020603050405020304" pitchFamily="18" charset="0"/>
+              </a:rPr>
+              <a:t>for</a:t>
+            </a:r>
+            <a:r>
+              <a:rPr lang="pt-BR" sz="2200" dirty="0">
+                <a:solidFill>
+                  <a:schemeClr val="tx1"/>
+                </a:solidFill>
+                <a:latin typeface="Times New Roman" panose="02020603050405020304" pitchFamily="18" charset="0"/>
+                <a:cs typeface="Times New Roman" panose="02020603050405020304" pitchFamily="18" charset="0"/>
+              </a:rPr>
+              <a:t> (i=0; i&lt;n; i++)</a:t>
+            </a:r>
+          </a:p>
+          <a:p>
+            <a:pPr marL="457200" lvl="1" indent="0" algn="just">
+              <a:buNone/>
+            </a:pPr>
+            <a:r>
+              <a:rPr lang="pt-BR" sz="2200" dirty="0">
+                <a:solidFill>
+                  <a:schemeClr val="tx1"/>
+                </a:solidFill>
+                <a:latin typeface="Times New Roman" panose="02020603050405020304" pitchFamily="18" charset="0"/>
+                <a:cs typeface="Times New Roman" panose="02020603050405020304" pitchFamily="18" charset="0"/>
+              </a:rPr>
+              <a:t>  		</a:t>
+            </a:r>
+            <a:r>
+              <a:rPr lang="pt-BR" sz="2200" dirty="0" err="1">
+                <a:solidFill>
+                  <a:schemeClr val="tx1"/>
+                </a:solidFill>
+                <a:latin typeface="Times New Roman" panose="02020603050405020304" pitchFamily="18" charset="0"/>
+                <a:cs typeface="Times New Roman" panose="02020603050405020304" pitchFamily="18" charset="0"/>
+              </a:rPr>
+              <a:t>System.out.</a:t>
+            </a:r>
+            <a:r>
+              <a:rPr lang="pt-BR" sz="2200" b="1" dirty="0" err="1">
+                <a:solidFill>
+                  <a:schemeClr val="tx1"/>
+                </a:solidFill>
+                <a:latin typeface="Times New Roman" panose="02020603050405020304" pitchFamily="18" charset="0"/>
+                <a:cs typeface="Times New Roman" panose="02020603050405020304" pitchFamily="18" charset="0"/>
+              </a:rPr>
+              <a:t>println</a:t>
+            </a:r>
+            <a:r>
+              <a:rPr lang="pt-BR" sz="2200" dirty="0">
+                <a:solidFill>
+                  <a:schemeClr val="tx1"/>
+                </a:solidFill>
+                <a:latin typeface="Times New Roman" panose="02020603050405020304" pitchFamily="18" charset="0"/>
+                <a:cs typeface="Times New Roman" panose="02020603050405020304" pitchFamily="18" charset="0"/>
+              </a:rPr>
+              <a:t>(v[i]); // </a:t>
+            </a:r>
+            <a:r>
+              <a:rPr lang="pt-BR" sz="2200" dirty="0" err="1">
+                <a:solidFill>
+                  <a:schemeClr val="tx1"/>
+                </a:solidFill>
+                <a:latin typeface="Times New Roman" panose="02020603050405020304" pitchFamily="18" charset="0"/>
+                <a:cs typeface="Times New Roman" panose="02020603050405020304" pitchFamily="18" charset="0"/>
+              </a:rPr>
+              <a:t>sysout</a:t>
+            </a:r>
+            <a:r>
+              <a:rPr lang="pt-BR" sz="2200" dirty="0">
+                <a:solidFill>
+                  <a:schemeClr val="tx1"/>
+                </a:solidFill>
+                <a:latin typeface="Times New Roman" panose="02020603050405020304" pitchFamily="18" charset="0"/>
+                <a:cs typeface="Times New Roman" panose="02020603050405020304" pitchFamily="18" charset="0"/>
+              </a:rPr>
+              <a:t> + </a:t>
+            </a:r>
+            <a:r>
+              <a:rPr lang="pt-BR" sz="2200" dirty="0" err="1">
+                <a:solidFill>
+                  <a:schemeClr val="tx1"/>
+                </a:solidFill>
+                <a:latin typeface="Times New Roman" panose="02020603050405020304" pitchFamily="18" charset="0"/>
+                <a:cs typeface="Times New Roman" panose="02020603050405020304" pitchFamily="18" charset="0"/>
+              </a:rPr>
+              <a:t>ctrl+barra</a:t>
+            </a:r>
+            <a:r>
+              <a:rPr lang="pt-BR" sz="2200" dirty="0">
+                <a:solidFill>
+                  <a:schemeClr val="tx1"/>
+                </a:solidFill>
+                <a:latin typeface="Times New Roman" panose="02020603050405020304" pitchFamily="18" charset="0"/>
+                <a:cs typeface="Times New Roman" panose="02020603050405020304" pitchFamily="18" charset="0"/>
+              </a:rPr>
+              <a:t> de espaço</a:t>
             </a:r>
           </a:p>
         </p:txBody>
@@ -8952,6 +9184,13 @@
           <a:lstStyle/>
           <a:p>
             <a:pPr algn="l"/>
+            <a:br>
+              <a:rPr lang="pt-BR" b="1" dirty="0">
+                <a:solidFill>
+                  <a:schemeClr val="bg1"/>
+                </a:solidFill>
+              </a:rPr>
+            </a:br>
             <a:r>
               <a:rPr lang="pt-BR" b="1" dirty="0">
                 <a:solidFill>
@@ -12617,7 +12856,27 @@
                 <a:latin typeface="Times New Roman" panose="02020603050405020304" pitchFamily="18" charset="0"/>
                 <a:cs typeface="Times New Roman" panose="02020603050405020304" pitchFamily="18" charset="0"/>
               </a:rPr>
-              <a:t>PATH=	</a:t>
+              <a:t>PATH</a:t>
+            </a:r>
+            <a:r>
+              <a:rPr lang="pt-BR" sz="2200" b="1" dirty="0">
+                <a:solidFill>
+                  <a:schemeClr val="tx1"/>
+                </a:solidFill>
+                <a:latin typeface="Times New Roman" panose="02020603050405020304" pitchFamily="18" charset="0"/>
+                <a:cs typeface="Times New Roman" panose="02020603050405020304" pitchFamily="18" charset="0"/>
+              </a:rPr>
+              <a:t>=</a:t>
+            </a:r>
+            <a:r>
+              <a:rPr lang="pt-BR" sz="2200" b="1" dirty="0">
+                <a:solidFill>
+                  <a:srgbClr val="0070C0"/>
+                </a:solidFill>
+                <a:latin typeface="Times New Roman" panose="02020603050405020304" pitchFamily="18" charset="0"/>
+                <a:cs typeface="Times New Roman" panose="02020603050405020304" pitchFamily="18" charset="0"/>
+              </a:rPr>
+              <a:t>	</a:t>
             </a:r>
             <a:r>
               <a:rPr lang="pt-BR" sz="2200" dirty="0">
@@ -14035,24 +14294,14 @@
               <a:t>int</a:t>
             </a:r>
             <a:r>
-              <a:rPr lang="pt-BR" sz="2200">
-                <a:solidFill>
-                  <a:schemeClr val="tx1"/>
-                </a:solidFill>
-                <a:latin typeface="Times New Roman" panose="02020603050405020304" pitchFamily="18" charset="0"/>
-                <a:cs typeface="Times New Roman" panose="02020603050405020304" pitchFamily="18" charset="0"/>
-              </a:rPr>
-              <a:t>, byte, short</a:t>
-            </a:r>
-            <a:r>
-              <a:rPr lang="pt-BR" sz="2200" dirty="0">
-                <a:solidFill>
-                  <a:schemeClr val="tx1"/>
-                </a:solidFill>
-                <a:latin typeface="Times New Roman" panose="02020603050405020304" pitchFamily="18" charset="0"/>
-                <a:cs typeface="Times New Roman" panose="02020603050405020304" pitchFamily="18" charset="0"/>
-              </a:rPr>
-              <a:t>, </a:t>
+              <a:rPr lang="pt-BR" sz="2200" dirty="0">
+                <a:solidFill>
+                  <a:schemeClr val="tx1"/>
+                </a:solidFill>
+                <a:latin typeface="Times New Roman" panose="02020603050405020304" pitchFamily="18" charset="0"/>
+                <a:cs typeface="Times New Roman" panose="02020603050405020304" pitchFamily="18" charset="0"/>
+              </a:rPr>
+              <a:t>, byte, short, </a:t>
             </a:r>
             <a:r>
               <a:rPr lang="pt-BR" sz="2200" dirty="0" err="1">
@@ -14552,15 +14801,22 @@
               <a:t>close</a:t>
             </a:r>
             <a:r>
-              <a:rPr lang="pt-BR" sz="2200" dirty="0">
-                <a:solidFill>
-                  <a:schemeClr val="tx1"/>
-                </a:solidFill>
-                <a:latin typeface="Times New Roman" panose="02020603050405020304" pitchFamily="18" charset="0"/>
-                <a:cs typeface="Times New Roman" panose="02020603050405020304" pitchFamily="18" charset="0"/>
-              </a:rPr>
-              <a:t>( )</a:t>
-            </a:r>
+              <a:rPr lang="pt-BR" sz="2200">
+                <a:solidFill>
+                  <a:schemeClr val="tx1"/>
+                </a:solidFill>
+                <a:latin typeface="Times New Roman" panose="02020603050405020304" pitchFamily="18" charset="0"/>
+                <a:cs typeface="Times New Roman" panose="02020603050405020304" pitchFamily="18" charset="0"/>
+              </a:rPr>
+              <a:t>( );</a:t>
+            </a:r>
+            <a:endParaRPr lang="pt-BR" sz="2200" dirty="0">
+              <a:solidFill>
+                <a:schemeClr val="tx1"/>
+              </a:solidFill>
+              <a:latin typeface="Times New Roman" panose="02020603050405020304" pitchFamily="18" charset="0"/>
+              <a:cs typeface="Times New Roman" panose="02020603050405020304" pitchFamily="18" charset="0"/>
+            </a:endParaRPr>
           </a:p>
           <a:p>
             <a:pPr lvl="2" algn="just">
